--- a/images/slides/logo.pptx
+++ b/images/slides/logo.pptx
@@ -202,7 +202,7 @@
           <a:p>
             <a:fld id="{52A2B7F2-4ED9-403D-8D8A-879FE3B4014E}" type="datetimeFigureOut">
               <a:rPr lang="en-US" smtClean="0"/>
-              <a:t>2/9/26</a:t>
+              <a:t>4/7/26</a:t>
             </a:fld>
             <a:endParaRPr lang="en-US"/>
           </a:p>
@@ -1024,7 +1024,7 @@
           <a:p>
             <a:fld id="{A04A5567-2D39-432B-A86B-39F40DF129FF}" type="datetimeFigureOut">
               <a:rPr lang="en-US" smtClean="0"/>
-              <a:t>2/9/26</a:t>
+              <a:t>4/7/26</a:t>
             </a:fld>
             <a:endParaRPr lang="en-US"/>
           </a:p>
@@ -1222,7 +1222,7 @@
           <a:p>
             <a:fld id="{A04A5567-2D39-432B-A86B-39F40DF129FF}" type="datetimeFigureOut">
               <a:rPr lang="en-US" smtClean="0"/>
-              <a:t>2/9/26</a:t>
+              <a:t>4/7/26</a:t>
             </a:fld>
             <a:endParaRPr lang="en-US"/>
           </a:p>
@@ -1430,7 +1430,7 @@
           <a:p>
             <a:fld id="{A04A5567-2D39-432B-A86B-39F40DF129FF}" type="datetimeFigureOut">
               <a:rPr lang="en-US" smtClean="0"/>
-              <a:t>2/9/26</a:t>
+              <a:t>4/7/26</a:t>
             </a:fld>
             <a:endParaRPr lang="en-US"/>
           </a:p>
@@ -1628,7 +1628,7 @@
           <a:p>
             <a:fld id="{A04A5567-2D39-432B-A86B-39F40DF129FF}" type="datetimeFigureOut">
               <a:rPr lang="en-US" smtClean="0"/>
-              <a:t>2/9/26</a:t>
+              <a:t>4/7/26</a:t>
             </a:fld>
             <a:endParaRPr lang="en-US"/>
           </a:p>
@@ -1903,7 +1903,7 @@
           <a:p>
             <a:fld id="{A04A5567-2D39-432B-A86B-39F40DF129FF}" type="datetimeFigureOut">
               <a:rPr lang="en-US" smtClean="0"/>
-              <a:t>2/9/26</a:t>
+              <a:t>4/7/26</a:t>
             </a:fld>
             <a:endParaRPr lang="en-US"/>
           </a:p>
@@ -2168,7 +2168,7 @@
           <a:p>
             <a:fld id="{A04A5567-2D39-432B-A86B-39F40DF129FF}" type="datetimeFigureOut">
               <a:rPr lang="en-US" smtClean="0"/>
-              <a:t>2/9/26</a:t>
+              <a:t>4/7/26</a:t>
             </a:fld>
             <a:endParaRPr lang="en-US"/>
           </a:p>
@@ -2580,7 +2580,7 @@
           <a:p>
             <a:fld id="{A04A5567-2D39-432B-A86B-39F40DF129FF}" type="datetimeFigureOut">
               <a:rPr lang="en-US" smtClean="0"/>
-              <a:t>2/9/26</a:t>
+              <a:t>4/7/26</a:t>
             </a:fld>
             <a:endParaRPr lang="en-US"/>
           </a:p>
@@ -2721,7 +2721,7 @@
           <a:p>
             <a:fld id="{A04A5567-2D39-432B-A86B-39F40DF129FF}" type="datetimeFigureOut">
               <a:rPr lang="en-US" smtClean="0"/>
-              <a:t>2/9/26</a:t>
+              <a:t>4/7/26</a:t>
             </a:fld>
             <a:endParaRPr lang="en-US"/>
           </a:p>
@@ -2834,7 +2834,7 @@
           <a:p>
             <a:fld id="{A04A5567-2D39-432B-A86B-39F40DF129FF}" type="datetimeFigureOut">
               <a:rPr lang="en-US" smtClean="0"/>
-              <a:t>2/9/26</a:t>
+              <a:t>4/7/26</a:t>
             </a:fld>
             <a:endParaRPr lang="en-US"/>
           </a:p>
@@ -3145,7 +3145,7 @@
           <a:p>
             <a:fld id="{A04A5567-2D39-432B-A86B-39F40DF129FF}" type="datetimeFigureOut">
               <a:rPr lang="en-US" smtClean="0"/>
-              <a:t>2/9/26</a:t>
+              <a:t>4/7/26</a:t>
             </a:fld>
             <a:endParaRPr lang="en-US"/>
           </a:p>
@@ -3433,7 +3433,7 @@
           <a:p>
             <a:fld id="{A04A5567-2D39-432B-A86B-39F40DF129FF}" type="datetimeFigureOut">
               <a:rPr lang="en-US" smtClean="0"/>
-              <a:t>2/9/26</a:t>
+              <a:t>4/7/26</a:t>
             </a:fld>
             <a:endParaRPr lang="en-US"/>
           </a:p>
@@ -3674,7 +3674,7 @@
           <a:p>
             <a:fld id="{A04A5567-2D39-432B-A86B-39F40DF129FF}" type="datetimeFigureOut">
               <a:rPr lang="en-US" smtClean="0"/>
-              <a:t>2/9/26</a:t>
+              <a:t>4/7/26</a:t>
             </a:fld>
             <a:endParaRPr lang="en-US"/>
           </a:p>
